--- a/metro/metro-x02-pinterest-pin.pptx
+++ b/metro/metro-x02-pinterest-pin.pptx
@@ -3602,9 +3602,9 @@
                 <a:solidFill>
                   <a:srgbClr val="14161A"/>
                 </a:solidFill>
-                <a:latin typeface="Space Grotesk"/>
-                <a:ea typeface="Space Grotesk"/>
-                <a:cs typeface="Space Grotesk"/>
+                <a:latin typeface="HK Grotesk"/>
+                <a:ea typeface="HK Grotesk"/>
+                <a:cs typeface="HK Grotesk"/>
               </a:rPr>
               <a:t>NO</a:t>
             </a:r>
@@ -3711,9 +3711,9 @@
                 <a:solidFill>
                   <a:srgbClr val="14161A"/>
                 </a:solidFill>
-                <a:latin typeface="Space Grotesk"/>
-                <a:ea typeface="Space Grotesk"/>
-                <a:cs typeface="Space Grotesk"/>
+                <a:latin typeface="HK Grotesk"/>
+                <a:ea typeface="HK Grotesk"/>
+                <a:cs typeface="HK Grotesk"/>
               </a:rPr>
               <a:t>5 things</a:t>
             </a:r>
@@ -3750,9 +3750,9 @@
                 <a:solidFill>
                   <a:srgbClr val="14161A"/>
                 </a:solidFill>
-                <a:latin typeface="Space Grotesk"/>
-                <a:ea typeface="Space Grotesk"/>
-                <a:cs typeface="Space Grotesk"/>
+                <a:latin typeface="HK Grotesk"/>
+                <a:ea typeface="HK Grotesk"/>
+                <a:cs typeface="HK Grotesk"/>
               </a:rPr>
               <a:t>I tell every</a:t>
             </a:r>
@@ -3789,9 +3789,9 @@
                 <a:solidFill>
                   <a:srgbClr val="14161A"/>
                 </a:solidFill>
-                <a:latin typeface="Space Grotesk"/>
-                <a:ea typeface="Space Grotesk"/>
-                <a:cs typeface="Space Grotesk"/>
+                <a:latin typeface="HK Grotesk"/>
+                <a:ea typeface="HK Grotesk"/>
+                <a:cs typeface="HK Grotesk"/>
               </a:rPr>
               <a:t>first-time buyer.</a:t>
             </a:r>
@@ -3828,9 +3828,9 @@
                 <a:solidFill>
                   <a:srgbClr val="2D5BE3"/>
                 </a:solidFill>
-                <a:latin typeface="Space Grotesk"/>
-                <a:ea typeface="Space Grotesk"/>
-                <a:cs typeface="Space Grotesk"/>
+                <a:latin typeface="HK Grotesk"/>
+                <a:ea typeface="HK Grotesk"/>
+                <a:cs typeface="HK Grotesk"/>
               </a:rPr>
               <a:t>01</a:t>
             </a:r>
@@ -3863,9 +3863,9 @@
                 <a:solidFill>
                   <a:srgbClr val="14161A"/>
                 </a:solidFill>
-                <a:latin typeface="Space Grotesk"/>
-                <a:ea typeface="Space Grotesk"/>
-                <a:cs typeface="Space Grotesk"/>
+                <a:latin typeface="HK Grotesk"/>
+                <a:ea typeface="HK Grotesk"/>
+                <a:cs typeface="HK Grotesk"/>
               </a:rPr>
               <a:t>Get pre-approved first</a:t>
             </a:r>
@@ -3902,9 +3902,9 @@
                 <a:solidFill>
                   <a:srgbClr val="8A8F99"/>
                 </a:solidFill>
-                <a:latin typeface="Space Grotesk"/>
-                <a:ea typeface="Space Grotesk"/>
-                <a:cs typeface="Space Grotesk"/>
+                <a:latin typeface="HK Grotesk"/>
+                <a:ea typeface="HK Grotesk"/>
+                <a:cs typeface="HK Grotesk"/>
               </a:rPr>
               <a:t>Know your true number before you fall for a place.</a:t>
             </a:r>
@@ -3941,9 +3941,9 @@
                 <a:solidFill>
                   <a:srgbClr val="2D5BE3"/>
                 </a:solidFill>
-                <a:latin typeface="Space Grotesk"/>
-                <a:ea typeface="Space Grotesk"/>
-                <a:cs typeface="Space Grotesk"/>
+                <a:latin typeface="HK Grotesk"/>
+                <a:ea typeface="HK Grotesk"/>
+                <a:cs typeface="HK Grotesk"/>
               </a:rPr>
               <a:t>02</a:t>
             </a:r>
@@ -3976,9 +3976,9 @@
                 <a:solidFill>
                   <a:srgbClr val="14161A"/>
                 </a:solidFill>
-                <a:latin typeface="Space Grotesk"/>
-                <a:ea typeface="Space Grotesk"/>
-                <a:cs typeface="Space Grotesk"/>
+                <a:latin typeface="HK Grotesk"/>
+                <a:ea typeface="HK Grotesk"/>
+                <a:cs typeface="HK Grotesk"/>
               </a:rPr>
               <a:t>Budget past the price</a:t>
             </a:r>
@@ -4015,9 +4015,9 @@
                 <a:solidFill>
                   <a:srgbClr val="8A8F99"/>
                 </a:solidFill>
-                <a:latin typeface="Space Grotesk"/>
-                <a:ea typeface="Space Grotesk"/>
-                <a:cs typeface="Space Grotesk"/>
+                <a:latin typeface="HK Grotesk"/>
+                <a:ea typeface="HK Grotesk"/>
+                <a:cs typeface="HK Grotesk"/>
               </a:rPr>
               <a:t>Assessments, taxes, and parking add up monthly.</a:t>
             </a:r>
@@ -4054,9 +4054,9 @@
                 <a:solidFill>
                   <a:srgbClr val="2D5BE3"/>
                 </a:solidFill>
-                <a:latin typeface="Space Grotesk"/>
-                <a:ea typeface="Space Grotesk"/>
-                <a:cs typeface="Space Grotesk"/>
+                <a:latin typeface="HK Grotesk"/>
+                <a:ea typeface="HK Grotesk"/>
+                <a:cs typeface="HK Grotesk"/>
               </a:rPr>
               <a:t>03</a:t>
             </a:r>
@@ -4089,9 +4089,9 @@
                 <a:solidFill>
                   <a:srgbClr val="14161A"/>
                 </a:solidFill>
-                <a:latin typeface="Space Grotesk"/>
-                <a:ea typeface="Space Grotesk"/>
-                <a:cs typeface="Space Grotesk"/>
+                <a:latin typeface="HK Grotesk"/>
+                <a:ea typeface="HK Grotesk"/>
+                <a:cs typeface="HK Grotesk"/>
               </a:rPr>
               <a:t>See it at night</a:t>
             </a:r>
@@ -4128,9 +4128,9 @@
                 <a:solidFill>
                   <a:srgbClr val="8A8F99"/>
                 </a:solidFill>
-                <a:latin typeface="Space Grotesk"/>
-                <a:ea typeface="Space Grotesk"/>
-                <a:cs typeface="Space Grotesk"/>
+                <a:latin typeface="HK Grotesk"/>
+                <a:ea typeface="HK Grotesk"/>
+                <a:cs typeface="HK Grotesk"/>
               </a:rPr>
               <a:t>Traffic, light, and noise tell the real story.</a:t>
             </a:r>
@@ -4167,9 +4167,9 @@
                 <a:solidFill>
                   <a:srgbClr val="2D5BE3"/>
                 </a:solidFill>
-                <a:latin typeface="Space Grotesk"/>
-                <a:ea typeface="Space Grotesk"/>
-                <a:cs typeface="Space Grotesk"/>
+                <a:latin typeface="HK Grotesk"/>
+                <a:ea typeface="HK Grotesk"/>
+                <a:cs typeface="HK Grotesk"/>
               </a:rPr>
               <a:t>04</a:t>
             </a:r>
@@ -4202,9 +4202,9 @@
                 <a:solidFill>
                   <a:srgbClr val="14161A"/>
                 </a:solidFill>
-                <a:latin typeface="Space Grotesk"/>
-                <a:ea typeface="Space Grotesk"/>
-                <a:cs typeface="Space Grotesk"/>
+                <a:latin typeface="HK Grotesk"/>
+                <a:ea typeface="HK Grotesk"/>
+                <a:cs typeface="HK Grotesk"/>
               </a:rPr>
               <a:t>Read the assessment history</a:t>
             </a:r>
@@ -4241,9 +4241,9 @@
                 <a:solidFill>
                   <a:srgbClr val="8A8F99"/>
                 </a:solidFill>
-                <a:latin typeface="Space Grotesk"/>
-                <a:ea typeface="Space Grotesk"/>
-                <a:cs typeface="Space Grotesk"/>
+                <a:latin typeface="HK Grotesk"/>
+                <a:ea typeface="HK Grotesk"/>
+                <a:cs typeface="HK Grotesk"/>
               </a:rPr>
               <a:t>A healthy reserve fund protects your investment.</a:t>
             </a:r>
@@ -4280,9 +4280,9 @@
                 <a:solidFill>
                   <a:srgbClr val="2D5BE3"/>
                 </a:solidFill>
-                <a:latin typeface="Space Grotesk"/>
-                <a:ea typeface="Space Grotesk"/>
-                <a:cs typeface="Space Grotesk"/>
+                <a:latin typeface="HK Grotesk"/>
+                <a:ea typeface="HK Grotesk"/>
+                <a:cs typeface="HK Grotesk"/>
               </a:rPr>
               <a:t>05</a:t>
             </a:r>
@@ -4315,9 +4315,9 @@
                 <a:solidFill>
                   <a:srgbClr val="14161A"/>
                 </a:solidFill>
-                <a:latin typeface="Space Grotesk"/>
-                <a:ea typeface="Space Grotesk"/>
-                <a:cs typeface="Space Grotesk"/>
+                <a:latin typeface="HK Grotesk"/>
+                <a:ea typeface="HK Grotesk"/>
+                <a:cs typeface="HK Grotesk"/>
               </a:rPr>
               <a:t>Write a clean offer</a:t>
             </a:r>
@@ -4354,9 +4354,9 @@
                 <a:solidFill>
                   <a:srgbClr val="8A8F99"/>
                 </a:solidFill>
-                <a:latin typeface="Space Grotesk"/>
-                <a:ea typeface="Space Grotesk"/>
-                <a:cs typeface="Space Grotesk"/>
+                <a:latin typeface="HK Grotesk"/>
+                <a:ea typeface="HK Grotesk"/>
+                <a:cs typeface="HK Grotesk"/>
               </a:rPr>
               <a:t>Fewer contingencies beat a few thousand dollars.</a:t>
             </a:r>
@@ -4393,9 +4393,9 @@
                 <a:solidFill>
                   <a:srgbClr val="14161A"/>
                 </a:solidFill>
-                <a:latin typeface="Space Grotesk"/>
-                <a:ea typeface="Space Grotesk"/>
-                <a:cs typeface="Space Grotesk"/>
+                <a:latin typeface="HK Grotesk"/>
+                <a:ea typeface="HK Grotesk"/>
+                <a:cs typeface="HK Grotesk"/>
               </a:rPr>
               <a:t>Julian Reyes</a:t>
             </a:r>
